--- a/src/backend/bisheng/linsight/builtin_skills/bisheng-pptx/templates/operating/template.pptx
+++ b/src/backend/bisheng/linsight/builtin_skills/bisheng-pptx/templates/operating/template.pptx
@@ -2530,7 +2530,7 @@
               </a:lnSpc>
             </a:pPr>
             <a:r>
-              <a:rPr sz="1400" b="1">
+              <a:rPr sz="1300" b="1">
                 <a:solidFill>
                   <a:srgbClr val="C3CCDA"/>
                 </a:solidFill>
@@ -2612,7 +2612,7 @@
               </a:lnSpc>
             </a:pPr>
             <a:r>
-              <a:rPr sz="4000" b="1">
+              <a:rPr sz="4400" b="1">
                 <a:solidFill>
                   <a:srgbClr val="FFFFFF"/>
                 </a:solidFill>
@@ -2980,8 +2980,8 @@
         </p:nvSpPr>
         <p:spPr>
           <a:xfrm>
-            <a:off x="609600" y="6477000"/>
-            <a:ext cx="7112000" cy="177800"/>
+            <a:off x="609600" y="6273800"/>
+            <a:ext cx="7112000" cy="203200"/>
           </a:xfrm>
           <a:prstGeom prst="rect">
             <a:avLst/>
@@ -3000,7 +3000,7 @@
               </a:lnSpc>
             </a:pPr>
             <a:r>
-              <a:rPr sz="900" b="0">
+              <a:rPr sz="1000" b="0">
                 <a:solidFill>
                   <a:srgbClr val="66707F"/>
                 </a:solidFill>
@@ -3020,7 +3020,7 @@
         </p:nvSpPr>
         <p:spPr>
           <a:xfrm>
-            <a:off x="10820400" y="6451600"/>
+            <a:off x="10820400" y="6248400"/>
             <a:ext cx="762000" cy="203200"/>
           </a:xfrm>
           <a:prstGeom prst="rect">
@@ -3029,13 +3029,15 @@
           <a:noFill/>
         </p:spPr>
         <p:txBody>
-          <a:bodyPr wrap="none" lIns="0" rIns="0" tIns="0" bIns="0">
-            <a:spAutoFit/>
-          </a:bodyPr>
-          <a:lstStyle/>
-          <a:p>
-            <a:pPr algn="r"/>
-            <a:fld id="{B68FFD5C-576C-4E12-B317-A2C1C8455F48}" type="slidenum">
+          <a:bodyPr wrap="square" lIns="0" rIns="0" tIns="0" bIns="0">
+            <a:noAutofit/>
+          </a:bodyPr>
+          <a:lstStyle/>
+          <a:p>
+            <a:pPr algn="r">
+              <a:defRPr sz="1000"/>
+            </a:pPr>
+            <a:fld id="{1B767B22-C2AB-5A43-AB7F-C2F649DCF23D}" type="slidenum">
               <a:rPr lang="zh-CN" sz="1000">
                 <a:solidFill>
                   <a:srgbClr val="66707F"/>
@@ -3725,8 +3727,8 @@
         </p:nvSpPr>
         <p:spPr>
           <a:xfrm>
-            <a:off x="609600" y="6477000"/>
-            <a:ext cx="7112000" cy="177800"/>
+            <a:off x="609600" y="6273800"/>
+            <a:ext cx="7112000" cy="203200"/>
           </a:xfrm>
           <a:prstGeom prst="rect">
             <a:avLst/>
@@ -3745,7 +3747,7 @@
               </a:lnSpc>
             </a:pPr>
             <a:r>
-              <a:rPr sz="900" b="0">
+              <a:rPr sz="1000" b="0">
                 <a:solidFill>
                   <a:srgbClr val="66707F"/>
                 </a:solidFill>
@@ -3765,7 +3767,7 @@
         </p:nvSpPr>
         <p:spPr>
           <a:xfrm>
-            <a:off x="10820400" y="6451600"/>
+            <a:off x="10820400" y="6248400"/>
             <a:ext cx="762000" cy="203200"/>
           </a:xfrm>
           <a:prstGeom prst="rect">
@@ -3774,13 +3776,15 @@
           <a:noFill/>
         </p:spPr>
         <p:txBody>
-          <a:bodyPr wrap="none" lIns="0" rIns="0" tIns="0" bIns="0">
-            <a:spAutoFit/>
-          </a:bodyPr>
-          <a:lstStyle/>
-          <a:p>
-            <a:pPr algn="r"/>
-            <a:fld id="{EC2AC07E-F139-4B93-96E0-139B83D74CD9}" type="slidenum">
+          <a:bodyPr wrap="square" lIns="0" rIns="0" tIns="0" bIns="0">
+            <a:noAutofit/>
+          </a:bodyPr>
+          <a:lstStyle/>
+          <a:p>
+            <a:pPr algn="r">
+              <a:defRPr sz="1000"/>
+            </a:pPr>
+            <a:fld id="{3950F933-C224-5BA1-9F88-B2BDE135BA77}" type="slidenum">
               <a:rPr lang="zh-CN" sz="1000">
                 <a:solidFill>
                   <a:srgbClr val="66707F"/>
@@ -4869,8 +4873,8 @@
         </p:nvSpPr>
         <p:spPr>
           <a:xfrm>
-            <a:off x="609600" y="6477000"/>
-            <a:ext cx="7112000" cy="177800"/>
+            <a:off x="609600" y="6273800"/>
+            <a:ext cx="7112000" cy="203200"/>
           </a:xfrm>
           <a:prstGeom prst="rect">
             <a:avLst/>
@@ -4889,7 +4893,7 @@
               </a:lnSpc>
             </a:pPr>
             <a:r>
-              <a:rPr sz="900" b="0">
+              <a:rPr sz="1000" b="0">
                 <a:solidFill>
                   <a:srgbClr val="66707F"/>
                 </a:solidFill>
@@ -4909,7 +4913,7 @@
         </p:nvSpPr>
         <p:spPr>
           <a:xfrm>
-            <a:off x="10820400" y="6451600"/>
+            <a:off x="10820400" y="6248400"/>
             <a:ext cx="762000" cy="203200"/>
           </a:xfrm>
           <a:prstGeom prst="rect">
@@ -4918,13 +4922,15 @@
           <a:noFill/>
         </p:spPr>
         <p:txBody>
-          <a:bodyPr wrap="none" lIns="0" rIns="0" tIns="0" bIns="0">
-            <a:spAutoFit/>
-          </a:bodyPr>
-          <a:lstStyle/>
-          <a:p>
-            <a:pPr algn="r"/>
-            <a:fld id="{DEAA4885-0553-4CB3-8BCD-6AC27495E922}" type="slidenum">
+          <a:bodyPr wrap="square" lIns="0" rIns="0" tIns="0" bIns="0">
+            <a:noAutofit/>
+          </a:bodyPr>
+          <a:lstStyle/>
+          <a:p>
+            <a:pPr algn="r">
+              <a:defRPr sz="1000"/>
+            </a:pPr>
+            <a:fld id="{A5E9E063-CE35-5237-9DF1-78DD2AF0C627}" type="slidenum">
               <a:rPr lang="zh-CN" sz="1000">
                 <a:solidFill>
                   <a:srgbClr val="66707F"/>
@@ -5937,8 +5943,8 @@
         </p:nvSpPr>
         <p:spPr>
           <a:xfrm>
-            <a:off x="609600" y="6477000"/>
-            <a:ext cx="7112000" cy="177800"/>
+            <a:off x="609600" y="6273800"/>
+            <a:ext cx="7112000" cy="203200"/>
           </a:xfrm>
           <a:prstGeom prst="rect">
             <a:avLst/>
@@ -5957,7 +5963,7 @@
               </a:lnSpc>
             </a:pPr>
             <a:r>
-              <a:rPr sz="900" b="0">
+              <a:rPr sz="1000" b="0">
                 <a:solidFill>
                   <a:srgbClr val="66707F"/>
                 </a:solidFill>
@@ -5977,7 +5983,7 @@
         </p:nvSpPr>
         <p:spPr>
           <a:xfrm>
-            <a:off x="10820400" y="6451600"/>
+            <a:off x="10820400" y="6248400"/>
             <a:ext cx="762000" cy="203200"/>
           </a:xfrm>
           <a:prstGeom prst="rect">
@@ -5986,13 +5992,15 @@
           <a:noFill/>
         </p:spPr>
         <p:txBody>
-          <a:bodyPr wrap="none" lIns="0" rIns="0" tIns="0" bIns="0">
-            <a:spAutoFit/>
-          </a:bodyPr>
-          <a:lstStyle/>
-          <a:p>
-            <a:pPr algn="r"/>
-            <a:fld id="{CC299AEC-30AC-4302-9456-21D723FC87AA}" type="slidenum">
+          <a:bodyPr wrap="square" lIns="0" rIns="0" tIns="0" bIns="0">
+            <a:noAutofit/>
+          </a:bodyPr>
+          <a:lstStyle/>
+          <a:p>
+            <a:pPr algn="r">
+              <a:defRPr sz="1000"/>
+            </a:pPr>
+            <a:fld id="{349E0473-00C8-5CE8-88B9-C3B049F81443}" type="slidenum">
               <a:rPr lang="zh-CN" sz="1000">
                 <a:solidFill>
                   <a:srgbClr val="66707F"/>
@@ -6922,8 +6930,8 @@
         </p:nvSpPr>
         <p:spPr>
           <a:xfrm>
-            <a:off x="609600" y="6477000"/>
-            <a:ext cx="7112000" cy="177800"/>
+            <a:off x="609600" y="6273800"/>
+            <a:ext cx="7112000" cy="203200"/>
           </a:xfrm>
           <a:prstGeom prst="rect">
             <a:avLst/>
@@ -6942,7 +6950,7 @@
               </a:lnSpc>
             </a:pPr>
             <a:r>
-              <a:rPr sz="900" b="0">
+              <a:rPr sz="1000" b="0">
                 <a:solidFill>
                   <a:srgbClr val="66707F"/>
                 </a:solidFill>
@@ -6962,7 +6970,7 @@
         </p:nvSpPr>
         <p:spPr>
           <a:xfrm>
-            <a:off x="10820400" y="6451600"/>
+            <a:off x="10820400" y="6248400"/>
             <a:ext cx="762000" cy="203200"/>
           </a:xfrm>
           <a:prstGeom prst="rect">
@@ -6971,13 +6979,15 @@
           <a:noFill/>
         </p:spPr>
         <p:txBody>
-          <a:bodyPr wrap="none" lIns="0" rIns="0" tIns="0" bIns="0">
-            <a:spAutoFit/>
-          </a:bodyPr>
-          <a:lstStyle/>
-          <a:p>
-            <a:pPr algn="r"/>
-            <a:fld id="{75059274-521E-4A30-B29D-4C3A626283E3}" type="slidenum">
+          <a:bodyPr wrap="square" lIns="0" rIns="0" tIns="0" bIns="0">
+            <a:noAutofit/>
+          </a:bodyPr>
+          <a:lstStyle/>
+          <a:p>
+            <a:pPr algn="r">
+              <a:defRPr sz="1000"/>
+            </a:pPr>
+            <a:fld id="{E366128F-4C37-557A-8250-A070D1FA87FD}" type="slidenum">
               <a:rPr lang="zh-CN" sz="1000">
                 <a:solidFill>
                   <a:srgbClr val="66707F"/>
@@ -8350,8 +8360,8 @@
         </p:nvSpPr>
         <p:spPr>
           <a:xfrm>
-            <a:off x="609600" y="6477000"/>
-            <a:ext cx="7112000" cy="177800"/>
+            <a:off x="609600" y="6273800"/>
+            <a:ext cx="7112000" cy="203200"/>
           </a:xfrm>
           <a:prstGeom prst="rect">
             <a:avLst/>
@@ -8370,7 +8380,7 @@
               </a:lnSpc>
             </a:pPr>
             <a:r>
-              <a:rPr sz="900" b="0">
+              <a:rPr sz="1000" b="0">
                 <a:solidFill>
                   <a:srgbClr val="66707F"/>
                 </a:solidFill>
@@ -8390,7 +8400,7 @@
         </p:nvSpPr>
         <p:spPr>
           <a:xfrm>
-            <a:off x="10820400" y="6451600"/>
+            <a:off x="10820400" y="6248400"/>
             <a:ext cx="762000" cy="203200"/>
           </a:xfrm>
           <a:prstGeom prst="rect">
@@ -8399,13 +8409,15 @@
           <a:noFill/>
         </p:spPr>
         <p:txBody>
-          <a:bodyPr wrap="none" lIns="0" rIns="0" tIns="0" bIns="0">
-            <a:spAutoFit/>
-          </a:bodyPr>
-          <a:lstStyle/>
-          <a:p>
-            <a:pPr algn="r"/>
-            <a:fld id="{26EE1BDD-72DA-415A-9F35-6D833EB3DE58}" type="slidenum">
+          <a:bodyPr wrap="square" lIns="0" rIns="0" tIns="0" bIns="0">
+            <a:noAutofit/>
+          </a:bodyPr>
+          <a:lstStyle/>
+          <a:p>
+            <a:pPr algn="r">
+              <a:defRPr sz="1000"/>
+            </a:pPr>
+            <a:fld id="{AB698F0D-232A-576E-A904-571BAC291479}" type="slidenum">
               <a:rPr lang="zh-CN" sz="1000">
                 <a:solidFill>
                   <a:srgbClr val="66707F"/>
@@ -9529,8 +9541,8 @@
         </p:nvSpPr>
         <p:spPr>
           <a:xfrm>
-            <a:off x="609600" y="6477000"/>
-            <a:ext cx="7112000" cy="177800"/>
+            <a:off x="609600" y="6273800"/>
+            <a:ext cx="7112000" cy="203200"/>
           </a:xfrm>
           <a:prstGeom prst="rect">
             <a:avLst/>
@@ -9549,7 +9561,7 @@
               </a:lnSpc>
             </a:pPr>
             <a:r>
-              <a:rPr sz="900" b="0">
+              <a:rPr sz="1000" b="0">
                 <a:solidFill>
                   <a:srgbClr val="66707F"/>
                 </a:solidFill>
@@ -9569,7 +9581,7 @@
         </p:nvSpPr>
         <p:spPr>
           <a:xfrm>
-            <a:off x="10820400" y="6451600"/>
+            <a:off x="10820400" y="6248400"/>
             <a:ext cx="762000" cy="203200"/>
           </a:xfrm>
           <a:prstGeom prst="rect">
@@ -9578,13 +9590,15 @@
           <a:noFill/>
         </p:spPr>
         <p:txBody>
-          <a:bodyPr wrap="none" lIns="0" rIns="0" tIns="0" bIns="0">
-            <a:spAutoFit/>
-          </a:bodyPr>
-          <a:lstStyle/>
-          <a:p>
-            <a:pPr algn="r"/>
-            <a:fld id="{52065C2F-62C1-43B6-8E2C-D9085FDA0DF9}" type="slidenum">
+          <a:bodyPr wrap="square" lIns="0" rIns="0" tIns="0" bIns="0">
+            <a:noAutofit/>
+          </a:bodyPr>
+          <a:lstStyle/>
+          <a:p>
+            <a:pPr algn="r">
+              <a:defRPr sz="1000"/>
+            </a:pPr>
+            <a:fld id="{D7164EAD-C2F9-5764-BD66-910850F430CC}" type="slidenum">
               <a:rPr lang="zh-CN" sz="1000">
                 <a:solidFill>
                   <a:srgbClr val="66707F"/>
@@ -9792,8 +9806,8 @@
         </p:nvSpPr>
         <p:spPr>
           <a:xfrm>
-            <a:off x="609600" y="6477000"/>
-            <a:ext cx="7112000" cy="177800"/>
+            <a:off x="609600" y="6273800"/>
+            <a:ext cx="7112000" cy="203200"/>
           </a:xfrm>
           <a:prstGeom prst="rect">
             <a:avLst/>
@@ -9812,7 +9826,7 @@
               </a:lnSpc>
             </a:pPr>
             <a:r>
-              <a:rPr sz="900" b="0">
+              <a:rPr sz="1000" b="0">
                 <a:solidFill>
                   <a:srgbClr val="C3CCDA"/>
                 </a:solidFill>
@@ -9832,7 +9846,7 @@
         </p:nvSpPr>
         <p:spPr>
           <a:xfrm>
-            <a:off x="10820400" y="6451600"/>
+            <a:off x="10820400" y="6248400"/>
             <a:ext cx="762000" cy="203200"/>
           </a:xfrm>
           <a:prstGeom prst="rect">
@@ -9841,13 +9855,15 @@
           <a:noFill/>
         </p:spPr>
         <p:txBody>
-          <a:bodyPr wrap="none" lIns="0" rIns="0" tIns="0" bIns="0">
-            <a:spAutoFit/>
-          </a:bodyPr>
-          <a:lstStyle/>
-          <a:p>
-            <a:pPr algn="r"/>
-            <a:fld id="{D01B4B53-B79A-4B74-B90D-20AD88541196}" type="slidenum">
+          <a:bodyPr wrap="square" lIns="0" rIns="0" tIns="0" bIns="0">
+            <a:noAutofit/>
+          </a:bodyPr>
+          <a:lstStyle/>
+          <a:p>
+            <a:pPr algn="r">
+              <a:defRPr sz="1000"/>
+            </a:pPr>
+            <a:fld id="{30B9FFAC-B623-5EE0-B271-BA206C3D734F}" type="slidenum">
               <a:rPr lang="zh-CN" sz="1000">
                 <a:solidFill>
                   <a:srgbClr val="C3CCDA"/>
@@ -9975,8 +9991,8 @@
         </p:nvSpPr>
         <p:spPr>
           <a:xfrm>
-            <a:off x="609600" y="6477000"/>
-            <a:ext cx="7112000" cy="177800"/>
+            <a:off x="609600" y="6273800"/>
+            <a:ext cx="7112000" cy="203200"/>
           </a:xfrm>
           <a:prstGeom prst="rect">
             <a:avLst/>
@@ -9995,7 +10011,7 @@
               </a:lnSpc>
             </a:pPr>
             <a:r>
-              <a:rPr sz="900" b="0">
+              <a:rPr sz="1000" b="0">
                 <a:solidFill>
                   <a:srgbClr val="66707F"/>
                 </a:solidFill>
@@ -10015,7 +10031,7 @@
         </p:nvSpPr>
         <p:spPr>
           <a:xfrm>
-            <a:off x="10820400" y="6451600"/>
+            <a:off x="10820400" y="6248400"/>
             <a:ext cx="762000" cy="203200"/>
           </a:xfrm>
           <a:prstGeom prst="rect">
@@ -10024,13 +10040,15 @@
           <a:noFill/>
         </p:spPr>
         <p:txBody>
-          <a:bodyPr wrap="none" lIns="0" rIns="0" tIns="0" bIns="0">
-            <a:spAutoFit/>
-          </a:bodyPr>
-          <a:lstStyle/>
-          <a:p>
-            <a:pPr algn="r"/>
-            <a:fld id="{A6506161-FAD9-417E-B482-B41C2C714864}" type="slidenum">
+          <a:bodyPr wrap="square" lIns="0" rIns="0" tIns="0" bIns="0">
+            <a:noAutofit/>
+          </a:bodyPr>
+          <a:lstStyle/>
+          <a:p>
+            <a:pPr algn="r">
+              <a:defRPr sz="1000"/>
+            </a:pPr>
+            <a:fld id="{BD441F53-FCD6-523A-8E0B-97E32BCEAD75}" type="slidenum">
               <a:rPr lang="zh-CN" sz="1000">
                 <a:solidFill>
                   <a:srgbClr val="66707F"/>
@@ -10360,8 +10378,8 @@
         </p:nvSpPr>
         <p:spPr>
           <a:xfrm>
-            <a:off x="609600" y="6477000"/>
-            <a:ext cx="7112000" cy="177800"/>
+            <a:off x="609600" y="6273800"/>
+            <a:ext cx="7112000" cy="203200"/>
           </a:xfrm>
           <a:prstGeom prst="rect">
             <a:avLst/>
@@ -10380,7 +10398,7 @@
               </a:lnSpc>
             </a:pPr>
             <a:r>
-              <a:rPr sz="900" b="0">
+              <a:rPr sz="1000" b="0">
                 <a:solidFill>
                   <a:srgbClr val="66707F"/>
                 </a:solidFill>
@@ -10400,7 +10418,7 @@
         </p:nvSpPr>
         <p:spPr>
           <a:xfrm>
-            <a:off x="10820400" y="6451600"/>
+            <a:off x="10820400" y="6248400"/>
             <a:ext cx="762000" cy="203200"/>
           </a:xfrm>
           <a:prstGeom prst="rect">
@@ -10409,13 +10427,15 @@
           <a:noFill/>
         </p:spPr>
         <p:txBody>
-          <a:bodyPr wrap="none" lIns="0" rIns="0" tIns="0" bIns="0">
-            <a:spAutoFit/>
-          </a:bodyPr>
-          <a:lstStyle/>
-          <a:p>
-            <a:pPr algn="r"/>
-            <a:fld id="{7F439FB1-D088-4556-B6D5-33885DA09249}" type="slidenum">
+          <a:bodyPr wrap="square" lIns="0" rIns="0" tIns="0" bIns="0">
+            <a:noAutofit/>
+          </a:bodyPr>
+          <a:lstStyle/>
+          <a:p>
+            <a:pPr algn="r">
+              <a:defRPr sz="1000"/>
+            </a:pPr>
+            <a:fld id="{5F4E380A-6C71-5153-93B4-672DBE50471A}" type="slidenum">
               <a:rPr lang="zh-CN" sz="1000">
                 <a:solidFill>
                   <a:srgbClr val="66707F"/>
@@ -10800,8 +10820,8 @@
         </p:nvSpPr>
         <p:spPr>
           <a:xfrm>
-            <a:off x="609600" y="6477000"/>
-            <a:ext cx="7112000" cy="177800"/>
+            <a:off x="609600" y="6273800"/>
+            <a:ext cx="7112000" cy="203200"/>
           </a:xfrm>
           <a:prstGeom prst="rect">
             <a:avLst/>
@@ -10820,7 +10840,7 @@
               </a:lnSpc>
             </a:pPr>
             <a:r>
-              <a:rPr sz="900" b="0">
+              <a:rPr sz="1000" b="0">
                 <a:solidFill>
                   <a:srgbClr val="66707F"/>
                 </a:solidFill>
@@ -10840,7 +10860,7 @@
         </p:nvSpPr>
         <p:spPr>
           <a:xfrm>
-            <a:off x="10820400" y="6451600"/>
+            <a:off x="10820400" y="6248400"/>
             <a:ext cx="762000" cy="203200"/>
           </a:xfrm>
           <a:prstGeom prst="rect">
@@ -10849,13 +10869,15 @@
           <a:noFill/>
         </p:spPr>
         <p:txBody>
-          <a:bodyPr wrap="none" lIns="0" rIns="0" tIns="0" bIns="0">
-            <a:spAutoFit/>
-          </a:bodyPr>
-          <a:lstStyle/>
-          <a:p>
-            <a:pPr algn="r"/>
-            <a:fld id="{1EDCB8DD-97DA-4C8C-B5F4-212B0BC086C3}" type="slidenum">
+          <a:bodyPr wrap="square" lIns="0" rIns="0" tIns="0" bIns="0">
+            <a:noAutofit/>
+          </a:bodyPr>
+          <a:lstStyle/>
+          <a:p>
+            <a:pPr algn="r">
+              <a:defRPr sz="1000"/>
+            </a:pPr>
+            <a:fld id="{67AD9297-C7A4-5FAC-8099-378DA30F59CF}" type="slidenum">
               <a:rPr lang="zh-CN" sz="1000">
                 <a:solidFill>
                   <a:srgbClr val="66707F"/>
@@ -11549,8 +11571,8 @@
         </p:nvSpPr>
         <p:spPr>
           <a:xfrm>
-            <a:off x="609600" y="6477000"/>
-            <a:ext cx="7112000" cy="177800"/>
+            <a:off x="609600" y="6273800"/>
+            <a:ext cx="7112000" cy="203200"/>
           </a:xfrm>
           <a:prstGeom prst="rect">
             <a:avLst/>
@@ -11569,7 +11591,7 @@
               </a:lnSpc>
             </a:pPr>
             <a:r>
-              <a:rPr sz="900" b="0">
+              <a:rPr sz="1000" b="0">
                 <a:solidFill>
                   <a:srgbClr val="66707F"/>
                 </a:solidFill>
@@ -11589,7 +11611,7 @@
         </p:nvSpPr>
         <p:spPr>
           <a:xfrm>
-            <a:off x="10820400" y="6451600"/>
+            <a:off x="10820400" y="6248400"/>
             <a:ext cx="762000" cy="203200"/>
           </a:xfrm>
           <a:prstGeom prst="rect">
@@ -11598,13 +11620,15 @@
           <a:noFill/>
         </p:spPr>
         <p:txBody>
-          <a:bodyPr wrap="none" lIns="0" rIns="0" tIns="0" bIns="0">
-            <a:spAutoFit/>
-          </a:bodyPr>
-          <a:lstStyle/>
-          <a:p>
-            <a:pPr algn="r"/>
-            <a:fld id="{487141E0-EAA7-4D22-8F02-BD8D8486D1AA}" type="slidenum">
+          <a:bodyPr wrap="square" lIns="0" rIns="0" tIns="0" bIns="0">
+            <a:noAutofit/>
+          </a:bodyPr>
+          <a:lstStyle/>
+          <a:p>
+            <a:pPr algn="r">
+              <a:defRPr sz="1000"/>
+            </a:pPr>
+            <a:fld id="{69C75570-5F98-5438-967F-257D3380DC42}" type="slidenum">
               <a:rPr lang="zh-CN" sz="1000">
                 <a:solidFill>
                   <a:srgbClr val="66707F"/>
@@ -12420,8 +12444,8 @@
         </p:nvSpPr>
         <p:spPr>
           <a:xfrm>
-            <a:off x="609600" y="6477000"/>
-            <a:ext cx="7112000" cy="177800"/>
+            <a:off x="609600" y="6273800"/>
+            <a:ext cx="7112000" cy="203200"/>
           </a:xfrm>
           <a:prstGeom prst="rect">
             <a:avLst/>
@@ -12440,7 +12464,7 @@
               </a:lnSpc>
             </a:pPr>
             <a:r>
-              <a:rPr sz="900" b="0">
+              <a:rPr sz="1000" b="0">
                 <a:solidFill>
                   <a:srgbClr val="66707F"/>
                 </a:solidFill>
@@ -12460,7 +12484,7 @@
         </p:nvSpPr>
         <p:spPr>
           <a:xfrm>
-            <a:off x="10820400" y="6451600"/>
+            <a:off x="10820400" y="6248400"/>
             <a:ext cx="762000" cy="203200"/>
           </a:xfrm>
           <a:prstGeom prst="rect">
@@ -12469,13 +12493,15 @@
           <a:noFill/>
         </p:spPr>
         <p:txBody>
-          <a:bodyPr wrap="none" lIns="0" rIns="0" tIns="0" bIns="0">
-            <a:spAutoFit/>
-          </a:bodyPr>
-          <a:lstStyle/>
-          <a:p>
-            <a:pPr algn="r"/>
-            <a:fld id="{4D5BF19C-DE87-464B-A520-D7C0728FB05D}" type="slidenum">
+          <a:bodyPr wrap="square" lIns="0" rIns="0" tIns="0" bIns="0">
+            <a:noAutofit/>
+          </a:bodyPr>
+          <a:lstStyle/>
+          <a:p>
+            <a:pPr algn="r">
+              <a:defRPr sz="1000"/>
+            </a:pPr>
+            <a:fld id="{60609987-11B4-5492-88BE-7BEDC0138A13}" type="slidenum">
               <a:rPr lang="zh-CN" sz="1000">
                 <a:solidFill>
                   <a:srgbClr val="66707F"/>
@@ -13510,8 +13536,8 @@
         </p:nvSpPr>
         <p:spPr>
           <a:xfrm>
-            <a:off x="609600" y="6477000"/>
-            <a:ext cx="7112000" cy="177800"/>
+            <a:off x="609600" y="6273800"/>
+            <a:ext cx="7112000" cy="203200"/>
           </a:xfrm>
           <a:prstGeom prst="rect">
             <a:avLst/>
@@ -13530,7 +13556,7 @@
               </a:lnSpc>
             </a:pPr>
             <a:r>
-              <a:rPr sz="900" b="0">
+              <a:rPr sz="1000" b="0">
                 <a:solidFill>
                   <a:srgbClr val="66707F"/>
                 </a:solidFill>
@@ -13550,7 +13576,7 @@
         </p:nvSpPr>
         <p:spPr>
           <a:xfrm>
-            <a:off x="10820400" y="6451600"/>
+            <a:off x="10820400" y="6248400"/>
             <a:ext cx="762000" cy="203200"/>
           </a:xfrm>
           <a:prstGeom prst="rect">
@@ -13559,13 +13585,15 @@
           <a:noFill/>
         </p:spPr>
         <p:txBody>
-          <a:bodyPr wrap="none" lIns="0" rIns="0" tIns="0" bIns="0">
-            <a:spAutoFit/>
-          </a:bodyPr>
-          <a:lstStyle/>
-          <a:p>
-            <a:pPr algn="r"/>
-            <a:fld id="{4E092A15-D214-451A-BC74-59C3F3F8597A}" type="slidenum">
+          <a:bodyPr wrap="square" lIns="0" rIns="0" tIns="0" bIns="0">
+            <a:noAutofit/>
+          </a:bodyPr>
+          <a:lstStyle/>
+          <a:p>
+            <a:pPr algn="r">
+              <a:defRPr sz="1000"/>
+            </a:pPr>
+            <a:fld id="{4419E3E0-BF7F-5C42-8FC3-D4B9A7D0982B}" type="slidenum">
               <a:rPr lang="zh-CN" sz="1000">
                 <a:solidFill>
                   <a:srgbClr val="66707F"/>
